--- a/docs/report/NakhonSawanFlood_ประชาชนทั่วไป.pptx
+++ b/docs/report/NakhonSawanFlood_ประชาชนทั่วไป.pptx
@@ -14,6 +14,7 @@
     <p:sldId id="262" r:id="rId8"/>
     <p:sldId id="263" r:id="rId9"/>
     <p:sldId id="264" r:id="rId10"/>
+    <p:sldId id="267" r:id="rId18"/>
     <p:sldId id="265" r:id="rId11"/>
     <p:sldId id="266" r:id="rId12"/>
   </p:sldIdLst>
@@ -2224,6 +2225,10 @@
             <a:prstDash val="solid"/>
           </a:ln>
         </p:spPr>
+        <p:txBody>
+          <a:bodyPr/>
+          <a:p/>
+        </p:txBody>
       </p:sp>
       <p:pic>
         <p:nvPicPr>
@@ -2374,6 +2379,10 @@
             <a:prstDash val="solid"/>
           </a:ln>
         </p:spPr>
+        <p:txBody>
+          <a:bodyPr/>
+          <a:p/>
+        </p:txBody>
       </p:sp>
     </p:spTree>
   </p:cSld>
@@ -2472,6 +2481,10 @@
             <a:prstDash val="solid"/>
           </a:ln>
         </p:spPr>
+        <p:txBody>
+          <a:bodyPr/>
+          <a:p/>
+        </p:txBody>
       </p:sp>
       <p:sp>
         <p:nvSpPr>
@@ -2497,6 +2510,10 @@
             <a:prstDash val="solid"/>
           </a:ln>
         </p:spPr>
+        <p:txBody>
+          <a:bodyPr/>
+          <a:p/>
+        </p:txBody>
       </p:sp>
       <p:pic>
         <p:nvPicPr>
@@ -2626,6 +2643,10 @@
             <a:prstDash val="solid"/>
           </a:ln>
         </p:spPr>
+        <p:txBody>
+          <a:bodyPr/>
+          <a:p/>
+        </p:txBody>
       </p:sp>
       <p:sp>
         <p:nvSpPr>
@@ -2651,6 +2672,10 @@
             <a:prstDash val="solid"/>
           </a:ln>
         </p:spPr>
+        <p:txBody>
+          <a:bodyPr/>
+          <a:p/>
+        </p:txBody>
       </p:sp>
       <p:pic>
         <p:nvPicPr>
@@ -2780,6 +2805,10 @@
             <a:prstDash val="solid"/>
           </a:ln>
         </p:spPr>
+        <p:txBody>
+          <a:bodyPr/>
+          <a:p/>
+        </p:txBody>
       </p:sp>
       <p:sp>
         <p:nvSpPr>
@@ -2805,6 +2834,10 @@
             <a:prstDash val="solid"/>
           </a:ln>
         </p:spPr>
+        <p:txBody>
+          <a:bodyPr/>
+          <a:p/>
+        </p:txBody>
       </p:sp>
       <p:pic>
         <p:nvPicPr>
@@ -2934,6 +2967,10 @@
             <a:prstDash val="solid"/>
           </a:ln>
         </p:spPr>
+        <p:txBody>
+          <a:bodyPr/>
+          <a:p/>
+        </p:txBody>
       </p:sp>
       <p:sp>
         <p:nvSpPr>
@@ -2959,6 +2996,10 @@
             <a:prstDash val="solid"/>
           </a:ln>
         </p:spPr>
+        <p:txBody>
+          <a:bodyPr/>
+          <a:p/>
+        </p:txBody>
       </p:sp>
       <p:pic>
         <p:nvPicPr>
@@ -3088,6 +3129,10 @@
             <a:prstDash val="solid"/>
           </a:ln>
         </p:spPr>
+        <p:txBody>
+          <a:bodyPr/>
+          <a:p/>
+        </p:txBody>
       </p:sp>
       <p:sp>
         <p:nvSpPr>
@@ -3113,6 +3158,10 @@
             <a:prstDash val="solid"/>
           </a:ln>
         </p:spPr>
+        <p:txBody>
+          <a:bodyPr/>
+          <a:p/>
+        </p:txBody>
       </p:sp>
       <p:pic>
         <p:nvPicPr>
@@ -3242,6 +3291,10 @@
             <a:prstDash val="solid"/>
           </a:ln>
         </p:spPr>
+        <p:txBody>
+          <a:bodyPr/>
+          <a:p/>
+        </p:txBody>
       </p:sp>
       <p:sp>
         <p:nvSpPr>
@@ -3267,6 +3320,10 @@
             <a:prstDash val="solid"/>
           </a:ln>
         </p:spPr>
+        <p:txBody>
+          <a:bodyPr/>
+          <a:p/>
+        </p:txBody>
       </p:sp>
       <p:pic>
         <p:nvPicPr>
@@ -3403,7 +3460,7 @@
                 <a:ea typeface="Prompt" pitchFamily="34" charset="-122"/>
                 <a:cs typeface="Prompt" pitchFamily="34" charset="-120"/>
               </a:rPr>
-              <a:t>10</a:t>
+              <a:t>11</a:t>
             </a:r>
             <a:endParaRPr lang="en-US" sz="1100" dirty="0"/>
           </a:p>
@@ -3506,6 +3563,10 @@
             <a:prstDash val="solid"/>
           </a:ln>
         </p:spPr>
+        <p:txBody>
+          <a:bodyPr/>
+          <a:p/>
+        </p:txBody>
       </p:sp>
       <p:sp>
         <p:nvSpPr>
@@ -3611,6 +3672,10 @@
             <a:prstDash val="solid"/>
           </a:ln>
         </p:spPr>
+        <p:txBody>
+          <a:bodyPr/>
+          <a:p/>
+        </p:txBody>
       </p:sp>
       <p:sp>
         <p:nvSpPr>
@@ -3716,6 +3781,10 @@
             <a:prstDash val="solid"/>
           </a:ln>
         </p:spPr>
+        <p:txBody>
+          <a:bodyPr/>
+          <a:p/>
+        </p:txBody>
       </p:sp>
       <p:sp>
         <p:nvSpPr>
@@ -3821,6 +3890,10 @@
             <a:prstDash val="solid"/>
           </a:ln>
         </p:spPr>
+        <p:txBody>
+          <a:bodyPr/>
+          <a:p/>
+        </p:txBody>
       </p:sp>
       <p:sp>
         <p:nvSpPr>
@@ -3926,6 +3999,10 @@
             <a:prstDash val="solid"/>
           </a:ln>
         </p:spPr>
+        <p:txBody>
+          <a:bodyPr/>
+          <a:p/>
+        </p:txBody>
       </p:sp>
       <p:pic>
         <p:nvPicPr>
@@ -4026,6 +4103,766 @@
               <a:t>ตัวเลขในเว็บเป็นการประมาณจากคอมพิวเตอร์ ใช้ดูแนวโน้มเพื่อเตรียมตัว — ควรฟังประกาศจากอำเภอ ผู้ใหญ่บ้าน และ ปภ. ประกอบเสมอ</a:t>
             </a:r>
             <a:endParaRPr lang="en-US" sz="1600" dirty="0"/>
+          </a:p>
+        </p:txBody>
+      </p:sp>
+    </p:spTree>
+  </p:cSld>
+  <p:clrMapOvr>
+    <a:masterClrMapping/>
+  </p:clrMapOvr>
+</p:sld>
+</file>
+
+<file path=ppt/slides/slide12.xml><?xml version="1.0" encoding="utf-8"?>
+<p:sld xmlns:a="http://schemas.openxmlformats.org/drawingml/2006/main" xmlns:p="http://schemas.openxmlformats.org/presentationml/2006/main" xmlns:r="http://schemas.openxmlformats.org/officeDocument/2006/relationships">
+  <p:cSld>
+    <p:spTree>
+      <p:nvGrpSpPr>
+        <p:cNvPr id="1" name=""/>
+        <p:cNvGrpSpPr/>
+        <p:nvPr/>
+      </p:nvGrpSpPr>
+      <p:grpSpPr/>
+      <p:sp>
+        <p:nvSpPr>
+          <p:cNvPr id="2" name="TextBox 1"/>
+          <p:cNvSpPr txBox="1"/>
+          <p:nvPr/>
+        </p:nvSpPr>
+        <p:spPr>
+          <a:xfrm>
+            <a:off x="548640" y="411480"/>
+            <a:ext cx="11064240" cy="822960"/>
+          </a:xfrm>
+          <a:prstGeom prst="rect">
+            <a:avLst/>
+          </a:prstGeom>
+          <a:noFill/>
+        </p:spPr>
+        <p:txBody>
+          <a:bodyPr wrap="square" anchor="t">
+            <a:spAutoFit/>
+          </a:bodyPr>
+          <a:lstStyle/>
+          <a:p>
+            <a:pPr algn="l"/>
+            <a:r>
+              <a:rPr sz="3600" b="1">
+                <a:solidFill>
+                  <a:srgbClr val="0B3B5C"/>
+                </a:solidFill>
+                <a:latin typeface="Prompt"/>
+              </a:rPr>
+              <a:t>ถ้าเกิดพายุใหญ่ น้ำจะขังนานที่ไหน?</a:t>
+            </a:r>
+          </a:p>
+        </p:txBody>
+      </p:sp>
+      <p:sp>
+        <p:nvSpPr>
+          <p:cNvPr id="3" name="Rectangle 2"/>
+          <p:cNvSpPr/>
+          <p:nvPr/>
+        </p:nvSpPr>
+        <p:spPr>
+          <a:xfrm>
+            <a:off x="493776" y="1948838"/>
+            <a:ext cx="5230368" cy="3600403"/>
+          </a:xfrm>
+          <a:prstGeom prst="rect">
+            <a:avLst/>
+          </a:prstGeom>
+          <a:solidFill>
+            <a:srgbClr val="FFFFFF"/>
+          </a:solidFill>
+          <a:ln w="9525">
+            <a:solidFill>
+              <a:srgbClr val="D7E0E8"/>
+            </a:solidFill>
+          </a:ln>
+          <a:effectLst/>
+        </p:spPr>
+        <p:style>
+          <a:lnRef idx="1">
+            <a:schemeClr val="accent1"/>
+          </a:lnRef>
+          <a:fillRef idx="3">
+            <a:schemeClr val="accent1"/>
+          </a:fillRef>
+          <a:effectRef idx="2">
+            <a:schemeClr val="accent1"/>
+          </a:effectRef>
+          <a:fontRef idx="minor">
+            <a:schemeClr val="lt1"/>
+          </a:fontRef>
+        </p:style>
+        <p:txBody>
+          <a:bodyPr rtlCol="0" anchor="ctr"/>
+          <a:lstStyle/>
+          <a:p>
+            <a:pPr algn="ctr"/>
+          </a:p>
+        </p:txBody>
+      </p:sp>
+      <p:pic>
+        <p:nvPicPr>
+          <p:cNvPr id="4" name="Picture 3" descr="prov_scnE.png"/>
+          <p:cNvPicPr>
+            <a:picLocks noChangeAspect="1"/>
+          </p:cNvPicPr>
+          <p:nvPr/>
+        </p:nvPicPr>
+        <p:blipFill>
+          <a:blip r:embed="rId2"/>
+          <a:stretch>
+            <a:fillRect/>
+          </a:stretch>
+        </p:blipFill>
+        <p:spPr>
+          <a:xfrm>
+            <a:off x="548640" y="2003702"/>
+            <a:ext cx="5120640" cy="3490675"/>
+          </a:xfrm>
+          <a:prstGeom prst="rect">
+            <a:avLst/>
+          </a:prstGeom>
+        </p:spPr>
+      </p:pic>
+      <p:sp>
+        <p:nvSpPr>
+          <p:cNvPr id="5" name="TextBox 4"/>
+          <p:cNvSpPr txBox="1"/>
+          <p:nvPr/>
+        </p:nvSpPr>
+        <p:spPr>
+          <a:xfrm>
+            <a:off x="548640" y="6126480"/>
+            <a:ext cx="5120640" cy="365760"/>
+          </a:xfrm>
+          <a:prstGeom prst="rect">
+            <a:avLst/>
+          </a:prstGeom>
+          <a:noFill/>
+        </p:spPr>
+        <p:txBody>
+          <a:bodyPr wrap="square" anchor="t">
+            <a:spAutoFit/>
+          </a:bodyPr>
+          <a:lstStyle/>
+          <a:p>
+            <a:pPr algn="l"/>
+            <a:r>
+              <a:rPr sz="1150" b="0">
+                <a:solidFill>
+                  <a:srgbClr val="5B6B7B"/>
+                </a:solidFill>
+                <a:latin typeface="Prompt"/>
+              </a:rPr>
+              <a:t>สีแดงเข้ม = น้ำขังนานกว่า 2 สัปดาห์</a:t>
+            </a:r>
+          </a:p>
+        </p:txBody>
+      </p:sp>
+      <p:sp>
+        <p:nvSpPr>
+          <p:cNvPr id="6" name="Oval 5"/>
+          <p:cNvSpPr/>
+          <p:nvPr/>
+        </p:nvSpPr>
+        <p:spPr>
+          <a:xfrm>
+            <a:off x="6035040" y="1463040"/>
+            <a:ext cx="731520" cy="731520"/>
+          </a:xfrm>
+          <a:prstGeom prst="ellipse">
+            <a:avLst/>
+          </a:prstGeom>
+          <a:solidFill>
+            <a:srgbClr val="2E86DE"/>
+          </a:solidFill>
+          <a:ln>
+            <a:noFill/>
+          </a:ln>
+        </p:spPr>
+        <p:style>
+          <a:lnRef idx="1">
+            <a:schemeClr val="accent1"/>
+          </a:lnRef>
+          <a:fillRef idx="3">
+            <a:schemeClr val="accent1"/>
+          </a:fillRef>
+          <a:effectRef idx="2">
+            <a:schemeClr val="accent1"/>
+          </a:effectRef>
+          <a:fontRef idx="minor">
+            <a:schemeClr val="lt1"/>
+          </a:fontRef>
+        </p:style>
+        <p:txBody>
+          <a:bodyPr rtlCol="0" anchor="ctr"/>
+          <a:lstStyle/>
+          <a:p>
+            <a:pPr algn="ctr"/>
+            <a:r>
+              <a:rPr sz="2200" b="1">
+                <a:solidFill>
+                  <a:srgbClr val="FFFFFF"/>
+                </a:solidFill>
+                <a:latin typeface="Prompt"/>
+              </a:rPr>
+              <a:t>1</a:t>
+            </a:r>
+          </a:p>
+        </p:txBody>
+      </p:sp>
+      <p:sp>
+        <p:nvSpPr>
+          <p:cNvPr id="7" name="TextBox 6"/>
+          <p:cNvSpPr txBox="1"/>
+          <p:nvPr/>
+        </p:nvSpPr>
+        <p:spPr>
+          <a:xfrm>
+            <a:off x="6949440" y="1444752"/>
+            <a:ext cx="4754880" cy="457200"/>
+          </a:xfrm>
+          <a:prstGeom prst="rect">
+            <a:avLst/>
+          </a:prstGeom>
+          <a:noFill/>
+        </p:spPr>
+        <p:txBody>
+          <a:bodyPr wrap="square" anchor="t">
+            <a:spAutoFit/>
+          </a:bodyPr>
+          <a:lstStyle/>
+          <a:p>
+            <a:pPr algn="l"/>
+            <a:r>
+              <a:rPr sz="2000" b="1">
+                <a:solidFill>
+                  <a:srgbClr val="0B3B5C"/>
+                </a:solidFill>
+                <a:latin typeface="Prompt"/>
+              </a:rPr>
+              <a:t>ฝนตกหนักมาก 250 มม. ใน 5 วัน</a:t>
+            </a:r>
+          </a:p>
+        </p:txBody>
+      </p:sp>
+      <p:sp>
+        <p:nvSpPr>
+          <p:cNvPr id="8" name="TextBox 7"/>
+          <p:cNvSpPr txBox="1"/>
+          <p:nvPr/>
+        </p:nvSpPr>
+        <p:spPr>
+          <a:xfrm>
+            <a:off x="6949440" y="1892808"/>
+            <a:ext cx="4754880" cy="548640"/>
+          </a:xfrm>
+          <a:prstGeom prst="rect">
+            <a:avLst/>
+          </a:prstGeom>
+          <a:noFill/>
+        </p:spPr>
+        <p:txBody>
+          <a:bodyPr wrap="square" anchor="t">
+            <a:spAutoFit/>
+          </a:bodyPr>
+          <a:lstStyle/>
+          <a:p>
+            <a:pPr algn="l"/>
+            <a:r>
+              <a:rPr sz="1500" b="0">
+                <a:solidFill>
+                  <a:srgbClr val="5B6B7B"/>
+                </a:solidFill>
+                <a:latin typeface="Prompt"/>
+              </a:rPr>
+              <a:t>แม่น้ำปกติ: น้ำขังเกิน 1 สัปดาห์ราว 9.3 หมื่นไร่</a:t>
+            </a:r>
+          </a:p>
+        </p:txBody>
+      </p:sp>
+      <p:sp>
+        <p:nvSpPr>
+          <p:cNvPr id="9" name="Oval 8"/>
+          <p:cNvSpPr/>
+          <p:nvPr/>
+        </p:nvSpPr>
+        <p:spPr>
+          <a:xfrm>
+            <a:off x="6035040" y="2560320"/>
+            <a:ext cx="731520" cy="731520"/>
+          </a:xfrm>
+          <a:prstGeom prst="ellipse">
+            <a:avLst/>
+          </a:prstGeom>
+          <a:solidFill>
+            <a:srgbClr val="2E86DE"/>
+          </a:solidFill>
+          <a:ln>
+            <a:noFill/>
+          </a:ln>
+        </p:spPr>
+        <p:style>
+          <a:lnRef idx="1">
+            <a:schemeClr val="accent1"/>
+          </a:lnRef>
+          <a:fillRef idx="3">
+            <a:schemeClr val="accent1"/>
+          </a:fillRef>
+          <a:effectRef idx="2">
+            <a:schemeClr val="accent1"/>
+          </a:effectRef>
+          <a:fontRef idx="minor">
+            <a:schemeClr val="lt1"/>
+          </a:fontRef>
+        </p:style>
+        <p:txBody>
+          <a:bodyPr rtlCol="0" anchor="ctr"/>
+          <a:lstStyle/>
+          <a:p>
+            <a:pPr algn="ctr"/>
+            <a:r>
+              <a:rPr sz="2200" b="1">
+                <a:solidFill>
+                  <a:srgbClr val="FFFFFF"/>
+                </a:solidFill>
+                <a:latin typeface="Prompt"/>
+              </a:rPr>
+              <a:t>2</a:t>
+            </a:r>
+          </a:p>
+        </p:txBody>
+      </p:sp>
+      <p:sp>
+        <p:nvSpPr>
+          <p:cNvPr id="10" name="TextBox 9"/>
+          <p:cNvSpPr txBox="1"/>
+          <p:nvPr/>
+        </p:nvSpPr>
+        <p:spPr>
+          <a:xfrm>
+            <a:off x="6949440" y="2542032"/>
+            <a:ext cx="4754880" cy="457200"/>
+          </a:xfrm>
+          <a:prstGeom prst="rect">
+            <a:avLst/>
+          </a:prstGeom>
+          <a:noFill/>
+        </p:spPr>
+        <p:txBody>
+          <a:bodyPr wrap="square" anchor="t">
+            <a:spAutoFit/>
+          </a:bodyPr>
+          <a:lstStyle/>
+          <a:p>
+            <a:pPr algn="l"/>
+            <a:r>
+              <a:rPr sz="2000" b="1">
+                <a:solidFill>
+                  <a:srgbClr val="0B3B5C"/>
+                </a:solidFill>
+                <a:latin typeface="Prompt"/>
+              </a:rPr>
+              <a:t>ถ้าแม่น้ำล้นตลิ่งด้วย</a:t>
+            </a:r>
+          </a:p>
+        </p:txBody>
+      </p:sp>
+      <p:sp>
+        <p:nvSpPr>
+          <p:cNvPr id="11" name="TextBox 10"/>
+          <p:cNvSpPr txBox="1"/>
+          <p:nvPr/>
+        </p:nvSpPr>
+        <p:spPr>
+          <a:xfrm>
+            <a:off x="6949440" y="2990087"/>
+            <a:ext cx="4754880" cy="548640"/>
+          </a:xfrm>
+          <a:prstGeom prst="rect">
+            <a:avLst/>
+          </a:prstGeom>
+          <a:noFill/>
+        </p:spPr>
+        <p:txBody>
+          <a:bodyPr wrap="square" anchor="t">
+            <a:spAutoFit/>
+          </a:bodyPr>
+          <a:lstStyle/>
+          <a:p>
+            <a:pPr algn="l"/>
+            <a:r>
+              <a:rPr sz="1500" b="0">
+                <a:solidFill>
+                  <a:srgbClr val="5B6B7B"/>
+                </a:solidFill>
+                <a:latin typeface="Prompt"/>
+              </a:rPr>
+              <a:t>น้ำขังนานเพิ่มเป็นราว 3.8 แสนไร่ — มากขึ้น 4 เท่า</a:t>
+            </a:r>
+          </a:p>
+        </p:txBody>
+      </p:sp>
+      <p:sp>
+        <p:nvSpPr>
+          <p:cNvPr id="12" name="Oval 11"/>
+          <p:cNvSpPr/>
+          <p:nvPr/>
+        </p:nvSpPr>
+        <p:spPr>
+          <a:xfrm>
+            <a:off x="6035040" y="3657600"/>
+            <a:ext cx="731520" cy="731520"/>
+          </a:xfrm>
+          <a:prstGeom prst="ellipse">
+            <a:avLst/>
+          </a:prstGeom>
+          <a:solidFill>
+            <a:srgbClr val="2E86DE"/>
+          </a:solidFill>
+          <a:ln>
+            <a:noFill/>
+          </a:ln>
+        </p:spPr>
+        <p:style>
+          <a:lnRef idx="1">
+            <a:schemeClr val="accent1"/>
+          </a:lnRef>
+          <a:fillRef idx="3">
+            <a:schemeClr val="accent1"/>
+          </a:fillRef>
+          <a:effectRef idx="2">
+            <a:schemeClr val="accent1"/>
+          </a:effectRef>
+          <a:fontRef idx="minor">
+            <a:schemeClr val="lt1"/>
+          </a:fontRef>
+        </p:style>
+        <p:txBody>
+          <a:bodyPr rtlCol="0" anchor="ctr"/>
+          <a:lstStyle/>
+          <a:p>
+            <a:pPr algn="ctr"/>
+            <a:r>
+              <a:rPr sz="2200" b="1">
+                <a:solidFill>
+                  <a:srgbClr val="FFFFFF"/>
+                </a:solidFill>
+                <a:latin typeface="Prompt"/>
+              </a:rPr>
+              <a:t>3</a:t>
+            </a:r>
+          </a:p>
+        </p:txBody>
+      </p:sp>
+      <p:sp>
+        <p:nvSpPr>
+          <p:cNvPr id="13" name="TextBox 12"/>
+          <p:cNvSpPr txBox="1"/>
+          <p:nvPr/>
+        </p:nvSpPr>
+        <p:spPr>
+          <a:xfrm>
+            <a:off x="6949440" y="3639312"/>
+            <a:ext cx="4754880" cy="457200"/>
+          </a:xfrm>
+          <a:prstGeom prst="rect">
+            <a:avLst/>
+          </a:prstGeom>
+          <a:noFill/>
+        </p:spPr>
+        <p:txBody>
+          <a:bodyPr wrap="square" anchor="t">
+            <a:spAutoFit/>
+          </a:bodyPr>
+          <a:lstStyle/>
+          <a:p>
+            <a:pPr algn="l"/>
+            <a:r>
+              <a:rPr sz="2000" b="1">
+                <a:solidFill>
+                  <a:srgbClr val="0B3B5C"/>
+                </a:solidFill>
+                <a:latin typeface="Prompt"/>
+              </a:rPr>
+              <a:t>อำเภอที่ต้องเตรียมมากที่สุด</a:t>
+            </a:r>
+          </a:p>
+        </p:txBody>
+      </p:sp>
+      <p:sp>
+        <p:nvSpPr>
+          <p:cNvPr id="14" name="TextBox 13"/>
+          <p:cNvSpPr txBox="1"/>
+          <p:nvPr/>
+        </p:nvSpPr>
+        <p:spPr>
+          <a:xfrm>
+            <a:off x="6949440" y="4087368"/>
+            <a:ext cx="4754880" cy="548640"/>
+          </a:xfrm>
+          <a:prstGeom prst="rect">
+            <a:avLst/>
+          </a:prstGeom>
+          <a:noFill/>
+        </p:spPr>
+        <p:txBody>
+          <a:bodyPr wrap="square" anchor="t">
+            <a:spAutoFit/>
+          </a:bodyPr>
+          <a:lstStyle/>
+          <a:p>
+            <a:pPr algn="l"/>
+            <a:r>
+              <a:rPr sz="1500" b="0">
+                <a:solidFill>
+                  <a:srgbClr val="5B6B7B"/>
+                </a:solidFill>
+                <a:latin typeface="Prompt"/>
+              </a:rPr>
+              <a:t>เมืองนครสวรรค์ · ท่าตะโก · ชุมแสง</a:t>
+            </a:r>
+          </a:p>
+        </p:txBody>
+      </p:sp>
+      <p:sp>
+        <p:nvSpPr>
+          <p:cNvPr id="15" name="Oval 14"/>
+          <p:cNvSpPr/>
+          <p:nvPr/>
+        </p:nvSpPr>
+        <p:spPr>
+          <a:xfrm>
+            <a:off x="6035040" y="4754879"/>
+            <a:ext cx="731520" cy="731520"/>
+          </a:xfrm>
+          <a:prstGeom prst="ellipse">
+            <a:avLst/>
+          </a:prstGeom>
+          <a:solidFill>
+            <a:srgbClr val="2E86DE"/>
+          </a:solidFill>
+          <a:ln>
+            <a:noFill/>
+          </a:ln>
+        </p:spPr>
+        <p:style>
+          <a:lnRef idx="1">
+            <a:schemeClr val="accent1"/>
+          </a:lnRef>
+          <a:fillRef idx="3">
+            <a:schemeClr val="accent1"/>
+          </a:fillRef>
+          <a:effectRef idx="2">
+            <a:schemeClr val="accent1"/>
+          </a:effectRef>
+          <a:fontRef idx="minor">
+            <a:schemeClr val="lt1"/>
+          </a:fontRef>
+        </p:style>
+        <p:txBody>
+          <a:bodyPr rtlCol="0" anchor="ctr"/>
+          <a:lstStyle/>
+          <a:p>
+            <a:pPr algn="ctr"/>
+            <a:r>
+              <a:rPr sz="2200" b="1">
+                <a:solidFill>
+                  <a:srgbClr val="FFFFFF"/>
+                </a:solidFill>
+                <a:latin typeface="Prompt"/>
+              </a:rPr>
+              <a:t>4</a:t>
+            </a:r>
+          </a:p>
+        </p:txBody>
+      </p:sp>
+      <p:sp>
+        <p:nvSpPr>
+          <p:cNvPr id="16" name="TextBox 15"/>
+          <p:cNvSpPr txBox="1"/>
+          <p:nvPr/>
+        </p:nvSpPr>
+        <p:spPr>
+          <a:xfrm>
+            <a:off x="6949440" y="4736592"/>
+            <a:ext cx="4754880" cy="457200"/>
+          </a:xfrm>
+          <a:prstGeom prst="rect">
+            <a:avLst/>
+          </a:prstGeom>
+          <a:noFill/>
+        </p:spPr>
+        <p:txBody>
+          <a:bodyPr wrap="square" anchor="t">
+            <a:spAutoFit/>
+          </a:bodyPr>
+          <a:lstStyle/>
+          <a:p>
+            <a:pPr algn="l"/>
+            <a:r>
+              <a:rPr sz="2000" b="1">
+                <a:solidFill>
+                  <a:srgbClr val="0B3B5C"/>
+                </a:solidFill>
+                <a:latin typeface="Prompt"/>
+              </a:rPr>
+              <a:t>ตำบลที่ควรเตรียมตัว</a:t>
+            </a:r>
+          </a:p>
+        </p:txBody>
+      </p:sp>
+      <p:sp>
+        <p:nvSpPr>
+          <p:cNvPr id="17" name="TextBox 16"/>
+          <p:cNvSpPr txBox="1"/>
+          <p:nvPr/>
+        </p:nvSpPr>
+        <p:spPr>
+          <a:xfrm>
+            <a:off x="6949440" y="5184647"/>
+            <a:ext cx="4754880" cy="548640"/>
+          </a:xfrm>
+          <a:prstGeom prst="rect">
+            <a:avLst/>
+          </a:prstGeom>
+          <a:noFill/>
+        </p:spPr>
+        <p:txBody>
+          <a:bodyPr wrap="square" anchor="t">
+            <a:spAutoFit/>
+          </a:bodyPr>
+          <a:lstStyle/>
+          <a:p>
+            <a:pPr algn="l"/>
+            <a:r>
+              <a:rPr sz="1500" b="0">
+                <a:solidFill>
+                  <a:srgbClr val="5B6B7B"/>
+                </a:solidFill>
+                <a:latin typeface="Prompt"/>
+              </a:rPr>
+              <a:t>วังมหากร · บางเคียน · พระนอน · ท่าตะโก · เกรียงไกร</a:t>
+            </a:r>
+          </a:p>
+        </p:txBody>
+      </p:sp>
+      <p:sp>
+        <p:nvSpPr>
+          <p:cNvPr id="18" name="Rectangle 17"/>
+          <p:cNvSpPr/>
+          <p:nvPr/>
+        </p:nvSpPr>
+        <p:spPr>
+          <a:xfrm>
+            <a:off x="6035040" y="5806440"/>
+            <a:ext cx="5577840" cy="731520"/>
+          </a:xfrm>
+          <a:prstGeom prst="rect">
+            <a:avLst/>
+          </a:prstGeom>
+          <a:solidFill>
+            <a:srgbClr val="FEF3C7"/>
+          </a:solidFill>
+          <a:ln>
+            <a:noFill/>
+          </a:ln>
+          <a:effectLst/>
+        </p:spPr>
+        <p:style>
+          <a:lnRef idx="1">
+            <a:schemeClr val="accent1"/>
+          </a:lnRef>
+          <a:fillRef idx="3">
+            <a:schemeClr val="accent1"/>
+          </a:fillRef>
+          <a:effectRef idx="2">
+            <a:schemeClr val="accent1"/>
+          </a:effectRef>
+          <a:fontRef idx="minor">
+            <a:schemeClr val="lt1"/>
+          </a:fontRef>
+        </p:style>
+        <p:txBody>
+          <a:bodyPr rtlCol="0" anchor="ctr"/>
+          <a:lstStyle/>
+          <a:p>
+            <a:pPr algn="ctr"/>
+          </a:p>
+        </p:txBody>
+      </p:sp>
+      <p:sp>
+        <p:nvSpPr>
+          <p:cNvPr id="19" name="TextBox 18"/>
+          <p:cNvSpPr txBox="1"/>
+          <p:nvPr/>
+        </p:nvSpPr>
+        <p:spPr>
+          <a:xfrm>
+            <a:off x="6217920" y="5833872"/>
+            <a:ext cx="5303520" cy="685800"/>
+          </a:xfrm>
+          <a:prstGeom prst="rect">
+            <a:avLst/>
+          </a:prstGeom>
+          <a:noFill/>
+        </p:spPr>
+        <p:txBody>
+          <a:bodyPr wrap="square" anchor="ctr">
+            <a:spAutoFit/>
+          </a:bodyPr>
+          <a:lstStyle/>
+          <a:p>
+            <a:pPr algn="l"/>
+            <a:r>
+              <a:rPr sz="1400" b="1">
+                <a:solidFill>
+                  <a:srgbClr val="1F2937"/>
+                </a:solidFill>
+                <a:latin typeface="Prompt"/>
+              </a:rPr>
+              <a:t>เป็นการจำลองล่วงหน้าเพื่อเตรียมตัว ไม่ใช่พยากรณ์ — ดูในเว็บหัวข้อ “ถ้าเกิดพายุใหญ่”</a:t>
+            </a:r>
+          </a:p>
+        </p:txBody>
+      </p:sp>
+      <p:sp>
+        <p:nvSpPr>
+          <p:cNvPr id="20" name="TextBox 19"/>
+          <p:cNvSpPr txBox="1"/>
+          <p:nvPr/>
+        </p:nvSpPr>
+        <p:spPr>
+          <a:xfrm>
+            <a:off x="11247120" y="6400800"/>
+            <a:ext cx="457200" cy="274320"/>
+          </a:xfrm>
+          <a:prstGeom prst="rect">
+            <a:avLst/>
+          </a:prstGeom>
+          <a:noFill/>
+        </p:spPr>
+        <p:txBody>
+          <a:bodyPr wrap="square" anchor="t">
+            <a:spAutoFit/>
+          </a:bodyPr>
+          <a:lstStyle/>
+          <a:p>
+            <a:pPr algn="l"/>
+            <a:r>
+              <a:rPr sz="1100" b="0">
+                <a:solidFill>
+                  <a:srgbClr val="5B6B7B"/>
+                </a:solidFill>
+                <a:latin typeface="Prompt"/>
+              </a:rPr>
+              <a:t>10</a:t>
+            </a:r>
           </a:p>
         </p:txBody>
       </p:sp>
@@ -4126,6 +4963,10 @@
             <a:prstDash val="solid"/>
           </a:ln>
         </p:spPr>
+        <p:txBody>
+          <a:bodyPr/>
+          <a:p/>
+        </p:txBody>
       </p:sp>
       <p:sp>
         <p:nvSpPr>
@@ -4151,6 +4992,10 @@
             <a:prstDash val="solid"/>
           </a:ln>
         </p:spPr>
+        <p:txBody>
+          <a:bodyPr/>
+          <a:p/>
+        </p:txBody>
       </p:sp>
       <p:pic>
         <p:nvPicPr>
@@ -4280,6 +5125,10 @@
             <a:prstDash val="solid"/>
           </a:ln>
         </p:spPr>
+        <p:txBody>
+          <a:bodyPr/>
+          <a:p/>
+        </p:txBody>
       </p:sp>
       <p:sp>
         <p:nvSpPr>
@@ -4305,6 +5154,10 @@
             <a:prstDash val="solid"/>
           </a:ln>
         </p:spPr>
+        <p:txBody>
+          <a:bodyPr/>
+          <a:p/>
+        </p:txBody>
       </p:sp>
       <p:pic>
         <p:nvPicPr>
@@ -4451,6 +5304,10 @@
             <a:prstDash val="solid"/>
           </a:ln>
         </p:spPr>
+        <p:txBody>
+          <a:bodyPr/>
+          <a:p/>
+        </p:txBody>
       </p:sp>
       <p:sp>
         <p:nvSpPr>
@@ -4476,6 +5333,10 @@
             <a:prstDash val="solid"/>
           </a:ln>
         </p:spPr>
+        <p:txBody>
+          <a:bodyPr/>
+          <a:p/>
+        </p:txBody>
       </p:sp>
       <p:pic>
         <p:nvPicPr>
@@ -4622,6 +5483,10 @@
             <a:prstDash val="solid"/>
           </a:ln>
         </p:spPr>
+        <p:txBody>
+          <a:bodyPr/>
+          <a:p/>
+        </p:txBody>
       </p:sp>
       <p:pic>
         <p:nvPicPr>
@@ -4859,6 +5724,10 @@
             <a:prstDash val="solid"/>
           </a:ln>
         </p:spPr>
+        <p:txBody>
+          <a:bodyPr/>
+          <a:p/>
+        </p:txBody>
       </p:sp>
       <p:pic>
         <p:nvPicPr>
@@ -4986,6 +5855,10 @@
             <a:prstDash val="solid"/>
           </a:ln>
         </p:spPr>
+        <p:txBody>
+          <a:bodyPr/>
+          <a:p/>
+        </p:txBody>
       </p:sp>
       <p:pic>
         <p:nvPicPr>
@@ -5113,6 +5986,10 @@
             <a:prstDash val="solid"/>
           </a:ln>
         </p:spPr>
+        <p:txBody>
+          <a:bodyPr/>
+          <a:p/>
+        </p:txBody>
       </p:sp>
       <p:pic>
         <p:nvPicPr>
@@ -5240,6 +6117,10 @@
             <a:prstDash val="solid"/>
           </a:ln>
         </p:spPr>
+        <p:txBody>
+          <a:bodyPr/>
+          <a:p/>
+        </p:txBody>
       </p:sp>
       <p:pic>
         <p:nvPicPr>
@@ -5393,6 +6274,10 @@
             <a:prstDash val="solid"/>
           </a:ln>
         </p:spPr>
+        <p:txBody>
+          <a:bodyPr/>
+          <a:p/>
+        </p:txBody>
       </p:sp>
       <p:pic>
         <p:nvPicPr>
@@ -5563,6 +6448,10 @@
             <a:prstDash val="solid"/>
           </a:ln>
         </p:spPr>
+        <p:txBody>
+          <a:bodyPr/>
+          <a:p/>
+        </p:txBody>
       </p:sp>
       <p:pic>
         <p:nvPicPr>
@@ -5873,6 +6762,10 @@
             <a:prstDash val="solid"/>
           </a:ln>
         </p:spPr>
+        <p:txBody>
+          <a:bodyPr/>
+          <a:p/>
+        </p:txBody>
       </p:sp>
       <p:sp>
         <p:nvSpPr>
@@ -6015,6 +6908,10 @@
             <a:prstDash val="solid"/>
           </a:ln>
         </p:spPr>
+        <p:txBody>
+          <a:bodyPr/>
+          <a:p/>
+        </p:txBody>
       </p:sp>
       <p:sp>
         <p:nvSpPr>
@@ -6157,6 +7054,10 @@
             <a:prstDash val="solid"/>
           </a:ln>
         </p:spPr>
+        <p:txBody>
+          <a:bodyPr/>
+          <a:p/>
+        </p:txBody>
       </p:sp>
       <p:sp>
         <p:nvSpPr>
@@ -6402,6 +7303,10 @@
             <a:prstDash val="solid"/>
           </a:ln>
         </p:spPr>
+        <p:txBody>
+          <a:bodyPr/>
+          <a:p/>
+        </p:txBody>
       </p:sp>
       <p:sp>
         <p:nvSpPr>
@@ -6578,6 +7483,10 @@
             <a:prstDash val="solid"/>
           </a:ln>
         </p:spPr>
+        <p:txBody>
+          <a:bodyPr/>
+          <a:p/>
+        </p:txBody>
       </p:sp>
       <p:pic>
         <p:nvPicPr>
@@ -6629,6 +7538,10 @@
             <a:prstDash val="solid"/>
           </a:ln>
         </p:spPr>
+        <p:txBody>
+          <a:bodyPr/>
+          <a:p/>
+        </p:txBody>
       </p:sp>
       <p:sp>
         <p:nvSpPr>
@@ -6773,6 +7686,10 @@
             <a:prstDash val="solid"/>
           </a:ln>
         </p:spPr>
+        <p:txBody>
+          <a:bodyPr/>
+          <a:p/>
+        </p:txBody>
       </p:sp>
       <p:pic>
         <p:nvPicPr>
@@ -6824,6 +7741,10 @@
             <a:prstDash val="solid"/>
           </a:ln>
         </p:spPr>
+        <p:txBody>
+          <a:bodyPr/>
+          <a:p/>
+        </p:txBody>
       </p:sp>
       <p:sp>
         <p:nvSpPr>
@@ -6968,6 +7889,10 @@
             <a:prstDash val="solid"/>
           </a:ln>
         </p:spPr>
+        <p:txBody>
+          <a:bodyPr/>
+          <a:p/>
+        </p:txBody>
       </p:sp>
       <p:pic>
         <p:nvPicPr>
@@ -7019,6 +7944,10 @@
             <a:prstDash val="solid"/>
           </a:ln>
         </p:spPr>
+        <p:txBody>
+          <a:bodyPr/>
+          <a:p/>
+        </p:txBody>
       </p:sp>
       <p:sp>
         <p:nvSpPr>
@@ -7163,6 +8092,10 @@
             <a:prstDash val="solid"/>
           </a:ln>
         </p:spPr>
+        <p:txBody>
+          <a:bodyPr/>
+          <a:p/>
+        </p:txBody>
       </p:sp>
       <p:pic>
         <p:nvPicPr>
@@ -7214,6 +8147,10 @@
             <a:prstDash val="solid"/>
           </a:ln>
         </p:spPr>
+        <p:txBody>
+          <a:bodyPr/>
+          <a:p/>
+        </p:txBody>
       </p:sp>
       <p:sp>
         <p:nvSpPr>
@@ -7487,6 +8424,10 @@
             <a:prstDash val="solid"/>
           </a:ln>
         </p:spPr>
+        <p:txBody>
+          <a:bodyPr/>
+          <a:p/>
+        </p:txBody>
       </p:sp>
       <p:sp>
         <p:nvSpPr>
@@ -7514,6 +8455,10 @@
             <a:prstDash val="solid"/>
           </a:ln>
         </p:spPr>
+        <p:txBody>
+          <a:bodyPr/>
+          <a:p/>
+        </p:txBody>
       </p:sp>
       <p:sp>
         <p:nvSpPr>
@@ -7619,6 +8564,10 @@
             <a:prstDash val="solid"/>
           </a:ln>
         </p:spPr>
+        <p:txBody>
+          <a:bodyPr/>
+          <a:p/>
+        </p:txBody>
       </p:sp>
       <p:sp>
         <p:nvSpPr>
@@ -7724,6 +8673,10 @@
             <a:prstDash val="solid"/>
           </a:ln>
         </p:spPr>
+        <p:txBody>
+          <a:bodyPr/>
+          <a:p/>
+        </p:txBody>
       </p:sp>
       <p:sp>
         <p:nvSpPr>
@@ -8017,6 +8970,10 @@
             <a:prstDash val="solid"/>
           </a:ln>
         </p:spPr>
+        <p:txBody>
+          <a:bodyPr/>
+          <a:p/>
+        </p:txBody>
       </p:sp>
       <p:sp>
         <p:nvSpPr>
@@ -8122,6 +9079,10 @@
             <a:prstDash val="solid"/>
           </a:ln>
         </p:spPr>
+        <p:txBody>
+          <a:bodyPr/>
+          <a:p/>
+        </p:txBody>
       </p:sp>
       <p:pic>
         <p:nvPicPr>
@@ -8212,6 +9173,10 @@
             <a:prstDash val="solid"/>
           </a:ln>
         </p:spPr>
+        <p:txBody>
+          <a:bodyPr/>
+          <a:p/>
+        </p:txBody>
       </p:sp>
       <p:sp>
         <p:nvSpPr>
@@ -8317,6 +9282,10 @@
             <a:prstDash val="solid"/>
           </a:ln>
         </p:spPr>
+        <p:txBody>
+          <a:bodyPr/>
+          <a:p/>
+        </p:txBody>
       </p:sp>
       <p:pic>
         <p:nvPicPr>
@@ -8407,6 +9376,10 @@
             <a:prstDash val="solid"/>
           </a:ln>
         </p:spPr>
+        <p:txBody>
+          <a:bodyPr/>
+          <a:p/>
+        </p:txBody>
       </p:sp>
       <p:sp>
         <p:nvSpPr>
@@ -8512,6 +9485,10 @@
             <a:prstDash val="solid"/>
           </a:ln>
         </p:spPr>
+        <p:txBody>
+          <a:bodyPr/>
+          <a:p/>
+        </p:txBody>
       </p:sp>
       <p:pic>
         <p:nvPicPr>
@@ -8602,6 +9579,10 @@
             <a:prstDash val="solid"/>
           </a:ln>
         </p:spPr>
+        <p:txBody>
+          <a:bodyPr/>
+          <a:p/>
+        </p:txBody>
       </p:sp>
       <p:sp>
         <p:nvSpPr>
@@ -8707,6 +9688,10 @@
             <a:prstDash val="solid"/>
           </a:ln>
         </p:spPr>
+        <p:txBody>
+          <a:bodyPr/>
+          <a:p/>
+        </p:txBody>
       </p:sp>
       <p:pic>
         <p:nvPicPr>
